--- a/Medicine.pptx
+++ b/Medicine.pptx
@@ -6,42 +6,41 @@
   </p:sldMasterIdLst>
   <p:sldIdLst>
     <p:sldId id="256" r:id="rId2"/>
-    <p:sldId id="257" r:id="rId3"/>
-    <p:sldId id="258" r:id="rId4"/>
-    <p:sldId id="259" r:id="rId5"/>
-    <p:sldId id="260" r:id="rId6"/>
-    <p:sldId id="261" r:id="rId7"/>
-    <p:sldId id="262" r:id="rId8"/>
-    <p:sldId id="263" r:id="rId9"/>
-    <p:sldId id="264" r:id="rId10"/>
-    <p:sldId id="265" r:id="rId11"/>
-    <p:sldId id="266" r:id="rId12"/>
-    <p:sldId id="271" r:id="rId13"/>
-    <p:sldId id="272" r:id="rId14"/>
-    <p:sldId id="268" r:id="rId15"/>
-    <p:sldId id="270" r:id="rId16"/>
+    <p:sldId id="258" r:id="rId3"/>
+    <p:sldId id="259" r:id="rId4"/>
+    <p:sldId id="260" r:id="rId5"/>
+    <p:sldId id="261" r:id="rId6"/>
+    <p:sldId id="262" r:id="rId7"/>
+    <p:sldId id="263" r:id="rId8"/>
+    <p:sldId id="264" r:id="rId9"/>
+    <p:sldId id="265" r:id="rId10"/>
+    <p:sldId id="266" r:id="rId11"/>
+    <p:sldId id="271" r:id="rId12"/>
+    <p:sldId id="272" r:id="rId13"/>
+    <p:sldId id="268" r:id="rId14"/>
+    <p:sldId id="270" r:id="rId15"/>
   </p:sldIdLst>
   <p:sldSz cx="18288000" cy="10287000"/>
   <p:notesSz cx="6858000" cy="9144000"/>
   <p:embeddedFontLst>
     <p:embeddedFont>
       <p:font typeface="Calibri" panose="020F0502020204030204" pitchFamily="34" charset="0"/>
-      <p:regular r:id="rId17"/>
-      <p:bold r:id="rId18"/>
-      <p:italic r:id="rId19"/>
-      <p:boldItalic r:id="rId20"/>
+      <p:regular r:id="rId16"/>
+      <p:bold r:id="rId17"/>
+      <p:italic r:id="rId18"/>
+      <p:boldItalic r:id="rId19"/>
     </p:embeddedFont>
     <p:embeddedFont>
       <p:font typeface="Coco Gothic" panose="020B0604020202020204" charset="0"/>
+      <p:regular r:id="rId20"/>
+    </p:embeddedFont>
+    <p:embeddedFont>
+      <p:font typeface="Coco Gothic Bold" panose="020B0604020202020204" charset="0"/>
       <p:regular r:id="rId21"/>
     </p:embeddedFont>
     <p:embeddedFont>
-      <p:font typeface="Coco Gothic Bold" panose="020B0604020202020204" charset="0"/>
+      <p:font typeface="TAN Headline" panose="020B0604020202020204" charset="0"/>
       <p:regular r:id="rId22"/>
-    </p:embeddedFont>
-    <p:embeddedFont>
-      <p:font typeface="TAN Headline" panose="020B0604020202020204" charset="0"/>
-      <p:regular r:id="rId23"/>
     </p:embeddedFont>
   </p:embeddedFontLst>
   <p:defaultTextStyle>
@@ -5115,481 +5114,6 @@
         </p:nvSpPr>
         <p:spPr>
           <a:xfrm rot="-591004">
-            <a:off x="10703618" y="144129"/>
-            <a:ext cx="9743832" cy="10202966"/>
-          </a:xfrm>
-          <a:custGeom>
-            <a:avLst/>
-            <a:gdLst/>
-            <a:ahLst/>
-            <a:cxnLst/>
-            <a:rect l="l" t="t" r="r" b="b"/>
-            <a:pathLst>
-              <a:path w="9743832" h="10202966">
-                <a:moveTo>
-                  <a:pt x="0" y="0"/>
-                </a:moveTo>
-                <a:lnTo>
-                  <a:pt x="9743832" y="0"/>
-                </a:lnTo>
-                <a:lnTo>
-                  <a:pt x="9743832" y="10202965"/>
-                </a:lnTo>
-                <a:lnTo>
-                  <a:pt x="0" y="10202965"/>
-                </a:lnTo>
-                <a:lnTo>
-                  <a:pt x="0" y="0"/>
-                </a:lnTo>
-                <a:close/>
-              </a:path>
-            </a:pathLst>
-          </a:custGeom>
-          <a:blipFill>
-            <a:blip r:embed="rId2">
-              <a:extLst>
-                <a:ext uri="{96DAC541-7B7A-43D3-8B79-37D633B846F1}">
-                  <asvg:svgBlip xmlns:asvg="http://schemas.microsoft.com/office/drawing/2016/SVG/main" r:embed="rId3"/>
-                </a:ext>
-              </a:extLst>
-            </a:blip>
-            <a:stretch>
-              <a:fillRect/>
-            </a:stretch>
-          </a:blipFill>
-        </p:spPr>
-      </p:sp>
-      <p:sp>
-        <p:nvSpPr>
-          <p:cNvPr id="3" name="Freeform 3"/>
-          <p:cNvSpPr/>
-          <p:nvPr/>
-        </p:nvSpPr>
-        <p:spPr>
-          <a:xfrm rot="2472354" flipH="1">
-            <a:off x="-1655856" y="-720788"/>
-            <a:ext cx="9743832" cy="10202966"/>
-          </a:xfrm>
-          <a:custGeom>
-            <a:avLst/>
-            <a:gdLst/>
-            <a:ahLst/>
-            <a:cxnLst/>
-            <a:rect l="l" t="t" r="r" b="b"/>
-            <a:pathLst>
-              <a:path w="9743832" h="10202966">
-                <a:moveTo>
-                  <a:pt x="9743833" y="0"/>
-                </a:moveTo>
-                <a:lnTo>
-                  <a:pt x="0" y="0"/>
-                </a:lnTo>
-                <a:lnTo>
-                  <a:pt x="0" y="10202965"/>
-                </a:lnTo>
-                <a:lnTo>
-                  <a:pt x="9743833" y="10202965"/>
-                </a:lnTo>
-                <a:lnTo>
-                  <a:pt x="9743833" y="0"/>
-                </a:lnTo>
-                <a:close/>
-              </a:path>
-            </a:pathLst>
-          </a:custGeom>
-          <a:blipFill>
-            <a:blip r:embed="rId2">
-              <a:extLst>
-                <a:ext uri="{96DAC541-7B7A-43D3-8B79-37D633B846F1}">
-                  <asvg:svgBlip xmlns:asvg="http://schemas.microsoft.com/office/drawing/2016/SVG/main" r:embed="rId3"/>
-                </a:ext>
-              </a:extLst>
-            </a:blip>
-            <a:stretch>
-              <a:fillRect/>
-            </a:stretch>
-          </a:blipFill>
-        </p:spPr>
-      </p:sp>
-      <p:sp>
-        <p:nvSpPr>
-          <p:cNvPr id="4" name="Freeform 4"/>
-          <p:cNvSpPr/>
-          <p:nvPr/>
-        </p:nvSpPr>
-        <p:spPr>
-          <a:xfrm rot="-441338" flipH="1">
-            <a:off x="2946394" y="1597514"/>
-            <a:ext cx="12395216" cy="7780208"/>
-          </a:xfrm>
-          <a:custGeom>
-            <a:avLst/>
-            <a:gdLst/>
-            <a:ahLst/>
-            <a:cxnLst/>
-            <a:rect l="l" t="t" r="r" b="b"/>
-            <a:pathLst>
-              <a:path w="12395216" h="7780208">
-                <a:moveTo>
-                  <a:pt x="12395216" y="0"/>
-                </a:moveTo>
-                <a:lnTo>
-                  <a:pt x="0" y="0"/>
-                </a:lnTo>
-                <a:lnTo>
-                  <a:pt x="0" y="7780208"/>
-                </a:lnTo>
-                <a:lnTo>
-                  <a:pt x="12395216" y="7780208"/>
-                </a:lnTo>
-                <a:lnTo>
-                  <a:pt x="12395216" y="0"/>
-                </a:lnTo>
-                <a:close/>
-              </a:path>
-            </a:pathLst>
-          </a:custGeom>
-          <a:blipFill>
-            <a:blip r:embed="rId4">
-              <a:extLst>
-                <a:ext uri="{96DAC541-7B7A-43D3-8B79-37D633B846F1}">
-                  <asvg:svgBlip xmlns:asvg="http://schemas.microsoft.com/office/drawing/2016/SVG/main" r:embed="rId5"/>
-                </a:ext>
-              </a:extLst>
-            </a:blip>
-            <a:stretch>
-              <a:fillRect/>
-            </a:stretch>
-          </a:blipFill>
-        </p:spPr>
-      </p:sp>
-      <p:sp>
-        <p:nvSpPr>
-          <p:cNvPr id="5" name="Freeform 5"/>
-          <p:cNvSpPr/>
-          <p:nvPr/>
-        </p:nvSpPr>
-        <p:spPr>
-          <a:xfrm flipH="1">
-            <a:off x="13732019" y="4207014"/>
-            <a:ext cx="4113256" cy="6538413"/>
-          </a:xfrm>
-          <a:custGeom>
-            <a:avLst/>
-            <a:gdLst/>
-            <a:ahLst/>
-            <a:cxnLst/>
-            <a:rect l="l" t="t" r="r" b="b"/>
-            <a:pathLst>
-              <a:path w="4113256" h="6538413">
-                <a:moveTo>
-                  <a:pt x="4113256" y="0"/>
-                </a:moveTo>
-                <a:lnTo>
-                  <a:pt x="0" y="0"/>
-                </a:lnTo>
-                <a:lnTo>
-                  <a:pt x="0" y="6538413"/>
-                </a:lnTo>
-                <a:lnTo>
-                  <a:pt x="4113256" y="6538413"/>
-                </a:lnTo>
-                <a:lnTo>
-                  <a:pt x="4113256" y="0"/>
-                </a:lnTo>
-                <a:close/>
-              </a:path>
-            </a:pathLst>
-          </a:custGeom>
-          <a:blipFill>
-            <a:blip r:embed="rId6">
-              <a:extLst>
-                <a:ext uri="{96DAC541-7B7A-43D3-8B79-37D633B846F1}">
-                  <asvg:svgBlip xmlns:asvg="http://schemas.microsoft.com/office/drawing/2016/SVG/main" r:embed="rId7"/>
-                </a:ext>
-              </a:extLst>
-            </a:blip>
-            <a:stretch>
-              <a:fillRect/>
-            </a:stretch>
-          </a:blipFill>
-        </p:spPr>
-      </p:sp>
-      <p:sp>
-        <p:nvSpPr>
-          <p:cNvPr id="6" name="Freeform 6"/>
-          <p:cNvSpPr/>
-          <p:nvPr/>
-        </p:nvSpPr>
-        <p:spPr>
-          <a:xfrm>
-            <a:off x="820399" y="2005164"/>
-            <a:ext cx="3357908" cy="8281836"/>
-          </a:xfrm>
-          <a:custGeom>
-            <a:avLst/>
-            <a:gdLst/>
-            <a:ahLst/>
-            <a:cxnLst/>
-            <a:rect l="l" t="t" r="r" b="b"/>
-            <a:pathLst>
-              <a:path w="3357908" h="8281836">
-                <a:moveTo>
-                  <a:pt x="0" y="0"/>
-                </a:moveTo>
-                <a:lnTo>
-                  <a:pt x="3357908" y="0"/>
-                </a:lnTo>
-                <a:lnTo>
-                  <a:pt x="3357908" y="8281836"/>
-                </a:lnTo>
-                <a:lnTo>
-                  <a:pt x="0" y="8281836"/>
-                </a:lnTo>
-                <a:lnTo>
-                  <a:pt x="0" y="0"/>
-                </a:lnTo>
-                <a:close/>
-              </a:path>
-            </a:pathLst>
-          </a:custGeom>
-          <a:blipFill>
-            <a:blip r:embed="rId8">
-              <a:extLst>
-                <a:ext uri="{96DAC541-7B7A-43D3-8B79-37D633B846F1}">
-                  <asvg:svgBlip xmlns:asvg="http://schemas.microsoft.com/office/drawing/2016/SVG/main" r:embed="rId9"/>
-                </a:ext>
-              </a:extLst>
-            </a:blip>
-            <a:stretch>
-              <a:fillRect/>
-            </a:stretch>
-          </a:blipFill>
-        </p:spPr>
-      </p:sp>
-      <p:sp>
-        <p:nvSpPr>
-          <p:cNvPr id="7" name="Freeform 7"/>
-          <p:cNvSpPr/>
-          <p:nvPr/>
-        </p:nvSpPr>
-        <p:spPr>
-          <a:xfrm flipH="1">
-            <a:off x="14908788" y="2448585"/>
-            <a:ext cx="2936487" cy="1841978"/>
-          </a:xfrm>
-          <a:custGeom>
-            <a:avLst/>
-            <a:gdLst/>
-            <a:ahLst/>
-            <a:cxnLst/>
-            <a:rect l="l" t="t" r="r" b="b"/>
-            <a:pathLst>
-              <a:path w="2936487" h="1841978">
-                <a:moveTo>
-                  <a:pt x="2936487" y="0"/>
-                </a:moveTo>
-                <a:lnTo>
-                  <a:pt x="0" y="0"/>
-                </a:lnTo>
-                <a:lnTo>
-                  <a:pt x="0" y="1841979"/>
-                </a:lnTo>
-                <a:lnTo>
-                  <a:pt x="2936487" y="1841979"/>
-                </a:lnTo>
-                <a:lnTo>
-                  <a:pt x="2936487" y="0"/>
-                </a:lnTo>
-                <a:close/>
-              </a:path>
-            </a:pathLst>
-          </a:custGeom>
-          <a:blipFill>
-            <a:blip r:embed="rId10">
-              <a:extLst>
-                <a:ext uri="{96DAC541-7B7A-43D3-8B79-37D633B846F1}">
-                  <asvg:svgBlip xmlns:asvg="http://schemas.microsoft.com/office/drawing/2016/SVG/main" r:embed="rId11"/>
-                </a:ext>
-              </a:extLst>
-            </a:blip>
-            <a:stretch>
-              <a:fillRect/>
-            </a:stretch>
-          </a:blipFill>
-        </p:spPr>
-      </p:sp>
-      <p:sp>
-        <p:nvSpPr>
-          <p:cNvPr id="8" name="TextBox 8"/>
-          <p:cNvSpPr txBox="1"/>
-          <p:nvPr/>
-        </p:nvSpPr>
-        <p:spPr>
-          <a:xfrm>
-            <a:off x="4033464" y="4207014"/>
-            <a:ext cx="10221072" cy="3119315"/>
-          </a:xfrm>
-          <a:prstGeom prst="rect">
-            <a:avLst/>
-          </a:prstGeom>
-        </p:spPr>
-        <p:txBody>
-          <a:bodyPr wrap="square" lIns="0" tIns="0" rIns="0" bIns="0" rtlCol="0" anchor="t">
-            <a:spAutoFit/>
-          </a:bodyPr>
-          <a:lstStyle/>
-          <a:p>
-            <a:pPr marL="342900" indent="-342900">
-              <a:lnSpc>
-                <a:spcPts val="3499"/>
-              </a:lnSpc>
-              <a:buFont typeface="Arial" panose="020B0604020202020204" pitchFamily="34" charset="0"/>
-              <a:buChar char="•"/>
-            </a:pPr>
-            <a:r>
-              <a:rPr lang="ka-GE" sz="2499" dirty="0">
-                <a:solidFill>
-                  <a:srgbClr val="3B365F"/>
-                </a:solidFill>
-                <a:latin typeface="Coco Gothic"/>
-                <a:ea typeface="Coco Gothic"/>
-                <a:cs typeface="Coco Gothic"/>
-                <a:sym typeface="Coco Gothic"/>
-              </a:rPr>
-              <a:t>კარგი მოვლის საფუძველი – პაციენტის უსაფრთხოება არის ხარისხიანი მკურნალობის მთავარი ნაწილი. </a:t>
-            </a:r>
-          </a:p>
-          <a:p>
-            <a:pPr marL="342900" indent="-342900">
-              <a:lnSpc>
-                <a:spcPts val="3499"/>
-              </a:lnSpc>
-              <a:buFont typeface="Arial" panose="020B0604020202020204" pitchFamily="34" charset="0"/>
-              <a:buChar char="•"/>
-            </a:pPr>
-            <a:r>
-              <a:rPr lang="ka-GE" sz="2499" dirty="0">
-                <a:solidFill>
-                  <a:srgbClr val="3B365F"/>
-                </a:solidFill>
-                <a:latin typeface="Coco Gothic"/>
-                <a:ea typeface="Coco Gothic"/>
-                <a:cs typeface="Coco Gothic"/>
-                <a:sym typeface="Coco Gothic"/>
-              </a:rPr>
-              <a:t>შეცდომების შემცირება მთავარი მიზანი – მთავარი არა შეცდომის მოძებნა, არამედ მათი თავიდან აცილებაა.</a:t>
-            </a:r>
-          </a:p>
-          <a:p>
-            <a:pPr marL="342900" indent="-342900">
-              <a:lnSpc>
-                <a:spcPts val="3499"/>
-              </a:lnSpc>
-              <a:buFont typeface="Arial" panose="020B0604020202020204" pitchFamily="34" charset="0"/>
-              <a:buChar char="•"/>
-            </a:pPr>
-            <a:r>
-              <a:rPr lang="ka-GE" sz="2499" dirty="0">
-                <a:solidFill>
-                  <a:srgbClr val="3B365F"/>
-                </a:solidFill>
-                <a:latin typeface="Coco Gothic"/>
-                <a:ea typeface="Coco Gothic"/>
-                <a:cs typeface="Coco Gothic"/>
-                <a:sym typeface="Coco Gothic"/>
-              </a:rPr>
-              <a:t>უსაფრთხო გარემო – საავადმყოფოში ან კლინიკაში შექმნილი გარემო უნდა იყოს ისე, რომ შეცდომა თითქმის შეუძლებელი იყოს.</a:t>
-            </a:r>
-            <a:endParaRPr lang="en-US" sz="2499" dirty="0">
-              <a:solidFill>
-                <a:srgbClr val="3B365F"/>
-              </a:solidFill>
-              <a:latin typeface="Coco Gothic"/>
-              <a:ea typeface="Coco Gothic"/>
-              <a:cs typeface="Coco Gothic"/>
-              <a:sym typeface="Coco Gothic"/>
-            </a:endParaRPr>
-          </a:p>
-        </p:txBody>
-      </p:sp>
-      <p:sp>
-        <p:nvSpPr>
-          <p:cNvPr id="9" name="TextBox 9"/>
-          <p:cNvSpPr txBox="1"/>
-          <p:nvPr/>
-        </p:nvSpPr>
-        <p:spPr>
-          <a:xfrm>
-            <a:off x="3216060" y="795606"/>
-            <a:ext cx="11345623" cy="598562"/>
-          </a:xfrm>
-          <a:prstGeom prst="rect">
-            <a:avLst/>
-          </a:prstGeom>
-        </p:spPr>
-        <p:txBody>
-          <a:bodyPr wrap="square" lIns="0" tIns="0" rIns="0" bIns="0" rtlCol="0" anchor="t">
-            <a:spAutoFit/>
-          </a:bodyPr>
-          <a:lstStyle/>
-          <a:p>
-            <a:pPr algn="ctr">
-              <a:lnSpc>
-                <a:spcPts val="3919"/>
-              </a:lnSpc>
-            </a:pPr>
-            <a:r>
-              <a:rPr lang="ka-GE" sz="6600" dirty="0"/>
-              <a:t>პაციენტის უსაფრთხოება</a:t>
-            </a:r>
-            <a:endParaRPr lang="en-US" sz="6600" dirty="0">
-              <a:sym typeface="TAN Headline"/>
-            </a:endParaRPr>
-          </a:p>
-        </p:txBody>
-      </p:sp>
-    </p:spTree>
-  </p:cSld>
-  <p:clrMapOvr>
-    <a:masterClrMapping/>
-  </p:clrMapOvr>
-</p:sld>
-</file>
-
-<file path=ppt/slides/slide11.xml><?xml version="1.0" encoding="utf-8"?>
-<p:sld xmlns:a="http://schemas.openxmlformats.org/drawingml/2006/main" xmlns:r="http://schemas.openxmlformats.org/officeDocument/2006/relationships" xmlns:p="http://schemas.openxmlformats.org/presentationml/2006/main">
-  <p:cSld>
-    <p:bg>
-      <p:bgPr>
-        <a:solidFill>
-          <a:srgbClr val="F0F6FF"/>
-        </a:solidFill>
-        <a:effectLst/>
-      </p:bgPr>
-    </p:bg>
-    <p:spTree>
-      <p:nvGrpSpPr>
-        <p:cNvPr id="1" name=""/>
-        <p:cNvGrpSpPr/>
-        <p:nvPr/>
-      </p:nvGrpSpPr>
-      <p:grpSpPr>
-        <a:xfrm>
-          <a:off x="0" y="0"/>
-          <a:ext cx="0" cy="0"/>
-          <a:chOff x="0" y="0"/>
-          <a:chExt cx="0" cy="0"/>
-        </a:xfrm>
-      </p:grpSpPr>
-      <p:sp>
-        <p:nvSpPr>
-          <p:cNvPr id="2" name="Freeform 2"/>
-          <p:cNvSpPr/>
-          <p:nvPr/>
-        </p:nvSpPr>
-        <p:spPr>
-          <a:xfrm rot="-591004">
             <a:off x="11007598" y="-3871282"/>
             <a:ext cx="9743832" cy="10202966"/>
           </a:xfrm>
@@ -6140,7 +5664,7 @@
 </p:sld>
 </file>
 
-<file path=ppt/slides/slide12.xml><?xml version="1.0" encoding="utf-8"?>
+<file path=ppt/slides/slide11.xml><?xml version="1.0" encoding="utf-8"?>
 <p:sld xmlns:a="http://schemas.openxmlformats.org/drawingml/2006/main" xmlns:r="http://schemas.openxmlformats.org/officeDocument/2006/relationships" xmlns:p="http://schemas.openxmlformats.org/presentationml/2006/main">
   <p:cSld>
     <p:bg>
@@ -8840,7 +8364,7 @@
 </p:sld>
 </file>
 
-<file path=ppt/slides/slide13.xml><?xml version="1.0" encoding="utf-8"?>
+<file path=ppt/slides/slide12.xml><?xml version="1.0" encoding="utf-8"?>
 <p:sld xmlns:a="http://schemas.openxmlformats.org/drawingml/2006/main" xmlns:r="http://schemas.openxmlformats.org/officeDocument/2006/relationships" xmlns:p="http://schemas.openxmlformats.org/presentationml/2006/main">
   <p:cSld>
     <p:bg>
@@ -11540,7 +11064,7 @@
 </p:sld>
 </file>
 
-<file path=ppt/slides/slide14.xml><?xml version="1.0" encoding="utf-8"?>
+<file path=ppt/slides/slide13.xml><?xml version="1.0" encoding="utf-8"?>
 <p:sld xmlns:a="http://schemas.openxmlformats.org/drawingml/2006/main" xmlns:r="http://schemas.openxmlformats.org/officeDocument/2006/relationships" xmlns:p="http://schemas.openxmlformats.org/presentationml/2006/main">
   <p:cSld>
     <p:bg>
@@ -11969,7 +11493,7 @@
 </p:sld>
 </file>
 
-<file path=ppt/slides/slide15.xml><?xml version="1.0" encoding="utf-8"?>
+<file path=ppt/slides/slide14.xml><?xml version="1.0" encoding="utf-8"?>
 <p:sld xmlns:a="http://schemas.openxmlformats.org/drawingml/2006/main" xmlns:r="http://schemas.openxmlformats.org/officeDocument/2006/relationships" xmlns:p="http://schemas.openxmlformats.org/presentationml/2006/main">
   <p:cSld>
     <p:bg>
@@ -13666,501 +13190,6 @@
 </file>
 
 <file path=ppt/slides/slide2.xml><?xml version="1.0" encoding="utf-8"?>
-<p:sld xmlns:a="http://schemas.openxmlformats.org/drawingml/2006/main" xmlns:r="http://schemas.openxmlformats.org/officeDocument/2006/relationships" xmlns:p="http://schemas.openxmlformats.org/presentationml/2006/main">
-  <p:cSld>
-    <p:bg>
-      <p:bgPr>
-        <a:solidFill>
-          <a:srgbClr val="F0F6FF"/>
-        </a:solidFill>
-        <a:effectLst/>
-      </p:bgPr>
-    </p:bg>
-    <p:spTree>
-      <p:nvGrpSpPr>
-        <p:cNvPr id="1" name=""/>
-        <p:cNvGrpSpPr/>
-        <p:nvPr/>
-      </p:nvGrpSpPr>
-      <p:grpSpPr>
-        <a:xfrm>
-          <a:off x="0" y="0"/>
-          <a:ext cx="0" cy="0"/>
-          <a:chOff x="0" y="0"/>
-          <a:chExt cx="0" cy="0"/>
-        </a:xfrm>
-      </p:grpSpPr>
-      <p:sp>
-        <p:nvSpPr>
-          <p:cNvPr id="4" name="Freeform 4"/>
-          <p:cNvSpPr/>
-          <p:nvPr/>
-        </p:nvSpPr>
-        <p:spPr>
-          <a:xfrm rot="-441338" flipH="1">
-            <a:off x="1608121" y="2418820"/>
-            <a:ext cx="16065837" cy="10084176"/>
-          </a:xfrm>
-          <a:custGeom>
-            <a:avLst/>
-            <a:gdLst/>
-            <a:ahLst/>
-            <a:cxnLst/>
-            <a:rect l="l" t="t" r="r" b="b"/>
-            <a:pathLst>
-              <a:path w="16065837" h="10084176">
-                <a:moveTo>
-                  <a:pt x="16065837" y="0"/>
-                </a:moveTo>
-                <a:lnTo>
-                  <a:pt x="0" y="0"/>
-                </a:lnTo>
-                <a:lnTo>
-                  <a:pt x="0" y="10084176"/>
-                </a:lnTo>
-                <a:lnTo>
-                  <a:pt x="16065837" y="10084176"/>
-                </a:lnTo>
-                <a:lnTo>
-                  <a:pt x="16065837" y="0"/>
-                </a:lnTo>
-                <a:close/>
-              </a:path>
-            </a:pathLst>
-          </a:custGeom>
-          <a:blipFill>
-            <a:blip r:embed="rId2">
-              <a:extLst>
-                <a:ext uri="{96DAC541-7B7A-43D3-8B79-37D633B846F1}">
-                  <asvg:svgBlip xmlns:asvg="http://schemas.microsoft.com/office/drawing/2016/SVG/main" r:embed="rId3"/>
-                </a:ext>
-              </a:extLst>
-            </a:blip>
-            <a:stretch>
-              <a:fillRect/>
-            </a:stretch>
-          </a:blipFill>
-        </p:spPr>
-      </p:sp>
-      <p:sp>
-        <p:nvSpPr>
-          <p:cNvPr id="2" name="Freeform 2"/>
-          <p:cNvSpPr/>
-          <p:nvPr/>
-        </p:nvSpPr>
-        <p:spPr>
-          <a:xfrm rot="5755965">
-            <a:off x="-2596635" y="-6569350"/>
-            <a:ext cx="9743832" cy="10202966"/>
-          </a:xfrm>
-          <a:custGeom>
-            <a:avLst/>
-            <a:gdLst/>
-            <a:ahLst/>
-            <a:cxnLst/>
-            <a:rect l="l" t="t" r="r" b="b"/>
-            <a:pathLst>
-              <a:path w="9743832" h="10202966">
-                <a:moveTo>
-                  <a:pt x="0" y="0"/>
-                </a:moveTo>
-                <a:lnTo>
-                  <a:pt x="9743832" y="0"/>
-                </a:lnTo>
-                <a:lnTo>
-                  <a:pt x="9743832" y="10202965"/>
-                </a:lnTo>
-                <a:lnTo>
-                  <a:pt x="0" y="10202965"/>
-                </a:lnTo>
-                <a:lnTo>
-                  <a:pt x="0" y="0"/>
-                </a:lnTo>
-                <a:close/>
-              </a:path>
-            </a:pathLst>
-          </a:custGeom>
-          <a:blipFill>
-            <a:blip r:embed="rId4">
-              <a:extLst>
-                <a:ext uri="{96DAC541-7B7A-43D3-8B79-37D633B846F1}">
-                  <asvg:svgBlip xmlns:asvg="http://schemas.microsoft.com/office/drawing/2016/SVG/main" r:embed="rId5"/>
-                </a:ext>
-              </a:extLst>
-            </a:blip>
-            <a:stretch>
-              <a:fillRect/>
-            </a:stretch>
-          </a:blipFill>
-        </p:spPr>
-      </p:sp>
-      <p:sp>
-        <p:nvSpPr>
-          <p:cNvPr id="3" name="Freeform 3"/>
-          <p:cNvSpPr/>
-          <p:nvPr/>
-        </p:nvSpPr>
-        <p:spPr>
-          <a:xfrm rot="-2386301">
-            <a:off x="10358985" y="-3230434"/>
-            <a:ext cx="9743832" cy="10202966"/>
-          </a:xfrm>
-          <a:custGeom>
-            <a:avLst/>
-            <a:gdLst/>
-            <a:ahLst/>
-            <a:cxnLst/>
-            <a:rect l="l" t="t" r="r" b="b"/>
-            <a:pathLst>
-              <a:path w="9743832" h="10202966">
-                <a:moveTo>
-                  <a:pt x="0" y="0"/>
-                </a:moveTo>
-                <a:lnTo>
-                  <a:pt x="9743833" y="0"/>
-                </a:lnTo>
-                <a:lnTo>
-                  <a:pt x="9743833" y="10202965"/>
-                </a:lnTo>
-                <a:lnTo>
-                  <a:pt x="0" y="10202965"/>
-                </a:lnTo>
-                <a:lnTo>
-                  <a:pt x="0" y="0"/>
-                </a:lnTo>
-                <a:close/>
-              </a:path>
-            </a:pathLst>
-          </a:custGeom>
-          <a:blipFill>
-            <a:blip r:embed="rId4">
-              <a:extLst>
-                <a:ext uri="{96DAC541-7B7A-43D3-8B79-37D633B846F1}">
-                  <asvg:svgBlip xmlns:asvg="http://schemas.microsoft.com/office/drawing/2016/SVG/main" r:embed="rId5"/>
-                </a:ext>
-              </a:extLst>
-            </a:blip>
-            <a:stretch>
-              <a:fillRect/>
-            </a:stretch>
-          </a:blipFill>
-        </p:spPr>
-      </p:sp>
-      <p:sp>
-        <p:nvSpPr>
-          <p:cNvPr id="5" name="Freeform 5"/>
-          <p:cNvSpPr/>
-          <p:nvPr/>
-        </p:nvSpPr>
-        <p:spPr>
-          <a:xfrm flipH="1">
-            <a:off x="14547103" y="3415779"/>
-            <a:ext cx="3740897" cy="10287468"/>
-          </a:xfrm>
-          <a:custGeom>
-            <a:avLst/>
-            <a:gdLst/>
-            <a:ahLst/>
-            <a:cxnLst/>
-            <a:rect l="l" t="t" r="r" b="b"/>
-            <a:pathLst>
-              <a:path w="3740897" h="10287468">
-                <a:moveTo>
-                  <a:pt x="3740897" y="0"/>
-                </a:moveTo>
-                <a:lnTo>
-                  <a:pt x="0" y="0"/>
-                </a:lnTo>
-                <a:lnTo>
-                  <a:pt x="0" y="10287467"/>
-                </a:lnTo>
-                <a:lnTo>
-                  <a:pt x="3740897" y="10287467"/>
-                </a:lnTo>
-                <a:lnTo>
-                  <a:pt x="3740897" y="0"/>
-                </a:lnTo>
-                <a:close/>
-              </a:path>
-            </a:pathLst>
-          </a:custGeom>
-          <a:blipFill>
-            <a:blip r:embed="rId6">
-              <a:extLst>
-                <a:ext uri="{96DAC541-7B7A-43D3-8B79-37D633B846F1}">
-                  <asvg:svgBlip xmlns:asvg="http://schemas.microsoft.com/office/drawing/2016/SVG/main" r:embed="rId7"/>
-                </a:ext>
-              </a:extLst>
-            </a:blip>
-            <a:stretch>
-              <a:fillRect/>
-            </a:stretch>
-          </a:blipFill>
-        </p:spPr>
-      </p:sp>
-      <p:sp>
-        <p:nvSpPr>
-          <p:cNvPr id="6" name="Freeform 6"/>
-          <p:cNvSpPr/>
-          <p:nvPr/>
-        </p:nvSpPr>
-        <p:spPr>
-          <a:xfrm>
-            <a:off x="582274" y="2956675"/>
-            <a:ext cx="2273231" cy="7063711"/>
-          </a:xfrm>
-          <a:custGeom>
-            <a:avLst/>
-            <a:gdLst/>
-            <a:ahLst/>
-            <a:cxnLst/>
-            <a:rect l="l" t="t" r="r" b="b"/>
-            <a:pathLst>
-              <a:path w="2273231" h="7063711">
-                <a:moveTo>
-                  <a:pt x="0" y="0"/>
-                </a:moveTo>
-                <a:lnTo>
-                  <a:pt x="2273231" y="0"/>
-                </a:lnTo>
-                <a:lnTo>
-                  <a:pt x="2273231" y="7063711"/>
-                </a:lnTo>
-                <a:lnTo>
-                  <a:pt x="0" y="7063711"/>
-                </a:lnTo>
-                <a:lnTo>
-                  <a:pt x="0" y="0"/>
-                </a:lnTo>
-                <a:close/>
-              </a:path>
-            </a:pathLst>
-          </a:custGeom>
-          <a:blipFill>
-            <a:blip r:embed="rId8">
-              <a:extLst>
-                <a:ext uri="{96DAC541-7B7A-43D3-8B79-37D633B846F1}">
-                  <asvg:svgBlip xmlns:asvg="http://schemas.microsoft.com/office/drawing/2016/SVG/main" r:embed="rId9"/>
-                </a:ext>
-              </a:extLst>
-            </a:blip>
-            <a:stretch>
-              <a:fillRect/>
-            </a:stretch>
-          </a:blipFill>
-        </p:spPr>
-      </p:sp>
-      <p:sp>
-        <p:nvSpPr>
-          <p:cNvPr id="7" name="TextBox 7"/>
-          <p:cNvSpPr txBox="1"/>
-          <p:nvPr/>
-        </p:nvSpPr>
-        <p:spPr>
-          <a:xfrm>
-            <a:off x="3322403" y="4984239"/>
-            <a:ext cx="10432006" cy="3575274"/>
-          </a:xfrm>
-          <a:prstGeom prst="rect">
-            <a:avLst/>
-          </a:prstGeom>
-        </p:spPr>
-        <p:txBody>
-          <a:bodyPr lIns="0" tIns="0" rIns="0" bIns="0" rtlCol="0" anchor="t">
-            <a:spAutoFit/>
-          </a:bodyPr>
-          <a:lstStyle/>
-          <a:p>
-            <a:pPr algn="l">
-              <a:lnSpc>
-                <a:spcPts val="3499"/>
-              </a:lnSpc>
-            </a:pPr>
-            <a:r>
-              <a:rPr lang="ka-GE" sz="2499" dirty="0">
-                <a:solidFill>
-                  <a:srgbClr val="3B365F"/>
-                </a:solidFill>
-                <a:latin typeface="Coco Gothic"/>
-                <a:ea typeface="Coco Gothic"/>
-                <a:cs typeface="Coco Gothic"/>
-                <a:sym typeface="Coco Gothic"/>
-              </a:rPr>
-              <a:t>არასწორი სამედიცინო ქმედება </a:t>
-            </a:r>
-          </a:p>
-          <a:p>
-            <a:pPr algn="l">
-              <a:lnSpc>
-                <a:spcPts val="3499"/>
-              </a:lnSpc>
-            </a:pPr>
-            <a:r>
-              <a:rPr lang="ka-GE" sz="2499" dirty="0">
-                <a:solidFill>
-                  <a:srgbClr val="3B365F"/>
-                </a:solidFill>
-                <a:latin typeface="Coco Gothic"/>
-                <a:ea typeface="Coco Gothic"/>
-                <a:cs typeface="Coco Gothic"/>
-                <a:sym typeface="Coco Gothic"/>
-              </a:rPr>
-              <a:t>არასწორი გადაწყვეტილება </a:t>
-            </a:r>
-          </a:p>
-          <a:p>
-            <a:pPr algn="l">
-              <a:lnSpc>
-                <a:spcPts val="3499"/>
-              </a:lnSpc>
-            </a:pPr>
-            <a:r>
-              <a:rPr lang="ka-GE" sz="2499" dirty="0">
-                <a:solidFill>
-                  <a:srgbClr val="3B365F"/>
-                </a:solidFill>
-                <a:latin typeface="Coco Gothic"/>
-                <a:ea typeface="Coco Gothic"/>
-                <a:cs typeface="Coco Gothic"/>
-                <a:sym typeface="Coco Gothic"/>
-              </a:rPr>
-              <a:t>სტანდარტის დარღვევა </a:t>
-            </a:r>
-          </a:p>
-          <a:p>
-            <a:pPr algn="l">
-              <a:lnSpc>
-                <a:spcPts val="3499"/>
-              </a:lnSpc>
-            </a:pPr>
-            <a:r>
-              <a:rPr lang="ka-GE" sz="2499" dirty="0">
-                <a:solidFill>
-                  <a:srgbClr val="3B365F"/>
-                </a:solidFill>
-                <a:latin typeface="Coco Gothic"/>
-                <a:ea typeface="Coco Gothic"/>
-                <a:cs typeface="Coco Gothic"/>
-                <a:sym typeface="Coco Gothic"/>
-              </a:rPr>
-              <a:t>შესაძლებელია ზიანი პაციენტისთვის </a:t>
-            </a:r>
-            <a:r>
-              <a:rPr lang="en-US" sz="2499" dirty="0">
-                <a:solidFill>
-                  <a:srgbClr val="3B365F"/>
-                </a:solidFill>
-                <a:latin typeface="Coco Gothic"/>
-                <a:ea typeface="Coco Gothic"/>
-                <a:cs typeface="Coco Gothic"/>
-                <a:sym typeface="Coco Gothic"/>
-              </a:rPr>
-              <a:t>🗣 </a:t>
-            </a:r>
-            <a:r>
-              <a:rPr lang="ka-GE" sz="2499" dirty="0">
-                <a:solidFill>
-                  <a:srgbClr val="3B365F"/>
-                </a:solidFill>
-                <a:latin typeface="Coco Gothic"/>
-                <a:ea typeface="Coco Gothic"/>
-                <a:cs typeface="Coco Gothic"/>
-                <a:sym typeface="Coco Gothic"/>
-              </a:rPr>
-              <a:t>რას იტყვი (მაგალითით):</a:t>
-            </a:r>
-          </a:p>
-          <a:p>
-            <a:pPr algn="l">
-              <a:lnSpc>
-                <a:spcPts val="3499"/>
-              </a:lnSpc>
-            </a:pPr>
-            <a:endParaRPr lang="ka-GE" sz="2499" dirty="0">
-              <a:solidFill>
-                <a:srgbClr val="3B365F"/>
-              </a:solidFill>
-              <a:latin typeface="Coco Gothic"/>
-              <a:ea typeface="Coco Gothic"/>
-              <a:cs typeface="Coco Gothic"/>
-              <a:sym typeface="Coco Gothic"/>
-            </a:endParaRPr>
-          </a:p>
-          <a:p>
-            <a:pPr>
-              <a:lnSpc>
-                <a:spcPts val="3499"/>
-              </a:lnSpc>
-            </a:pPr>
-            <a:r>
-              <a:rPr lang="ka-GE" sz="2499" dirty="0">
-                <a:solidFill>
-                  <a:srgbClr val="3B365F"/>
-                </a:solidFill>
-              </a:rPr>
-              <a:t>მაგალითად, როცა ექიმი პაციენტს აძლევს ისეთ წამალს, რომელზეც მას ალერგია აქვს — ეს უკვე სამედიცინო შეცდომაა, მიუხედავად იმისა, რომ ექიმს ცუდი მიზანი არ ჰქონია.</a:t>
-            </a:r>
-            <a:endParaRPr lang="en-US" sz="2499" dirty="0">
-              <a:solidFill>
-                <a:srgbClr val="3B365F"/>
-              </a:solidFill>
-              <a:latin typeface="Coco Gothic"/>
-              <a:sym typeface="Coco Gothic"/>
-            </a:endParaRPr>
-          </a:p>
-        </p:txBody>
-      </p:sp>
-      <p:sp>
-        <p:nvSpPr>
-          <p:cNvPr id="11" name="TextBox 11"/>
-          <p:cNvSpPr txBox="1"/>
-          <p:nvPr/>
-        </p:nvSpPr>
-        <p:spPr>
-          <a:xfrm>
-            <a:off x="2855505" y="895350"/>
-            <a:ext cx="12576991" cy="2273102"/>
-          </a:xfrm>
-          <a:prstGeom prst="rect">
-            <a:avLst/>
-          </a:prstGeom>
-        </p:spPr>
-        <p:txBody>
-          <a:bodyPr lIns="0" tIns="0" rIns="0" bIns="0" rtlCol="0" anchor="t">
-            <a:spAutoFit/>
-          </a:bodyPr>
-          <a:lstStyle/>
-          <a:p>
-            <a:pPr algn="ctr">
-              <a:lnSpc>
-                <a:spcPts val="9100"/>
-              </a:lnSpc>
-            </a:pPr>
-            <a:r>
-              <a:rPr lang="ka-GE" sz="6600" dirty="0"/>
-              <a:t>სამედიცინო შეცდომის განმარტება</a:t>
-            </a:r>
-            <a:endParaRPr lang="en-US" sz="6500" dirty="0">
-              <a:solidFill>
-                <a:srgbClr val="3B365F"/>
-              </a:solidFill>
-              <a:latin typeface="TAN Headline"/>
-              <a:ea typeface="TAN Headline"/>
-              <a:cs typeface="TAN Headline"/>
-              <a:sym typeface="TAN Headline"/>
-            </a:endParaRPr>
-          </a:p>
-        </p:txBody>
-      </p:sp>
-    </p:spTree>
-  </p:cSld>
-  <p:clrMapOvr>
-    <a:masterClrMapping/>
-  </p:clrMapOvr>
-</p:sld>
-</file>
-
-<file path=ppt/slides/slide3.xml><?xml version="1.0" encoding="utf-8"?>
 <p:sld xmlns:a="http://schemas.openxmlformats.org/drawingml/2006/main" xmlns:r="http://schemas.openxmlformats.org/officeDocument/2006/relationships" xmlns:p="http://schemas.openxmlformats.org/presentationml/2006/main">
   <p:cSld>
     <p:bg>
@@ -14469,7 +13498,7 @@
 </p:sld>
 </file>
 
-<file path=ppt/slides/slide4.xml><?xml version="1.0" encoding="utf-8"?>
+<file path=ppt/slides/slide3.xml><?xml version="1.0" encoding="utf-8"?>
 <p:sld xmlns:a="http://schemas.openxmlformats.org/drawingml/2006/main" xmlns:r="http://schemas.openxmlformats.org/officeDocument/2006/relationships" xmlns:p="http://schemas.openxmlformats.org/presentationml/2006/main">
   <p:cSld>
     <p:bg>
@@ -16876,7 +15905,7 @@
 </p:sld>
 </file>
 
-<file path=ppt/slides/slide5.xml><?xml version="1.0" encoding="utf-8"?>
+<file path=ppt/slides/slide4.xml><?xml version="1.0" encoding="utf-8"?>
 <p:sld xmlns:a="http://schemas.openxmlformats.org/drawingml/2006/main" xmlns:r="http://schemas.openxmlformats.org/officeDocument/2006/relationships" xmlns:p="http://schemas.openxmlformats.org/presentationml/2006/main">
   <p:cSld>
     <p:bg>
@@ -17319,7 +16348,7 @@
 </p:sld>
 </file>
 
-<file path=ppt/slides/slide6.xml><?xml version="1.0" encoding="utf-8"?>
+<file path=ppt/slides/slide5.xml><?xml version="1.0" encoding="utf-8"?>
 <p:sld xmlns:a="http://schemas.openxmlformats.org/drawingml/2006/main" xmlns:r="http://schemas.openxmlformats.org/officeDocument/2006/relationships" xmlns:p="http://schemas.openxmlformats.org/presentationml/2006/main">
   <p:cSld>
     <p:bg>
@@ -19141,7 +18170,7 @@
 </p:sld>
 </file>
 
-<file path=ppt/slides/slide7.xml><?xml version="1.0" encoding="utf-8"?>
+<file path=ppt/slides/slide6.xml><?xml version="1.0" encoding="utf-8"?>
 <p:sld xmlns:a="http://schemas.openxmlformats.org/drawingml/2006/main" xmlns:r="http://schemas.openxmlformats.org/officeDocument/2006/relationships" xmlns:p="http://schemas.openxmlformats.org/presentationml/2006/main">
   <p:cSld>
     <p:bg>
@@ -19666,7 +18695,7 @@
 </p:sld>
 </file>
 
-<file path=ppt/slides/slide8.xml><?xml version="1.0" encoding="utf-8"?>
+<file path=ppt/slides/slide7.xml><?xml version="1.0" encoding="utf-8"?>
 <p:sld xmlns:a="http://schemas.openxmlformats.org/drawingml/2006/main" xmlns:r="http://schemas.openxmlformats.org/officeDocument/2006/relationships" xmlns:p="http://schemas.openxmlformats.org/presentationml/2006/main">
   <p:cSld>
     <p:bg>
@@ -20839,7 +19868,7 @@
 </p:sld>
 </file>
 
-<file path=ppt/slides/slide9.xml><?xml version="1.0" encoding="utf-8"?>
+<file path=ppt/slides/slide8.xml><?xml version="1.0" encoding="utf-8"?>
 <p:sld xmlns:a="http://schemas.openxmlformats.org/drawingml/2006/main" xmlns:r="http://schemas.openxmlformats.org/officeDocument/2006/relationships" xmlns:p="http://schemas.openxmlformats.org/presentationml/2006/main">
   <p:cSld>
     <p:bg>
@@ -23547,6 +22576,481 @@
               <a:t>არასაკმარისი კოორდინაცია</a:t>
             </a:r>
             <a:endParaRPr lang="en-US" sz="4000" dirty="0"/>
+          </a:p>
+        </p:txBody>
+      </p:sp>
+    </p:spTree>
+  </p:cSld>
+  <p:clrMapOvr>
+    <a:masterClrMapping/>
+  </p:clrMapOvr>
+</p:sld>
+</file>
+
+<file path=ppt/slides/slide9.xml><?xml version="1.0" encoding="utf-8"?>
+<p:sld xmlns:a="http://schemas.openxmlformats.org/drawingml/2006/main" xmlns:r="http://schemas.openxmlformats.org/officeDocument/2006/relationships" xmlns:p="http://schemas.openxmlformats.org/presentationml/2006/main">
+  <p:cSld>
+    <p:bg>
+      <p:bgPr>
+        <a:solidFill>
+          <a:srgbClr val="F0F6FF"/>
+        </a:solidFill>
+        <a:effectLst/>
+      </p:bgPr>
+    </p:bg>
+    <p:spTree>
+      <p:nvGrpSpPr>
+        <p:cNvPr id="1" name=""/>
+        <p:cNvGrpSpPr/>
+        <p:nvPr/>
+      </p:nvGrpSpPr>
+      <p:grpSpPr>
+        <a:xfrm>
+          <a:off x="0" y="0"/>
+          <a:ext cx="0" cy="0"/>
+          <a:chOff x="0" y="0"/>
+          <a:chExt cx="0" cy="0"/>
+        </a:xfrm>
+      </p:grpSpPr>
+      <p:sp>
+        <p:nvSpPr>
+          <p:cNvPr id="2" name="Freeform 2"/>
+          <p:cNvSpPr/>
+          <p:nvPr/>
+        </p:nvSpPr>
+        <p:spPr>
+          <a:xfrm rot="-591004">
+            <a:off x="10703618" y="144129"/>
+            <a:ext cx="9743832" cy="10202966"/>
+          </a:xfrm>
+          <a:custGeom>
+            <a:avLst/>
+            <a:gdLst/>
+            <a:ahLst/>
+            <a:cxnLst/>
+            <a:rect l="l" t="t" r="r" b="b"/>
+            <a:pathLst>
+              <a:path w="9743832" h="10202966">
+                <a:moveTo>
+                  <a:pt x="0" y="0"/>
+                </a:moveTo>
+                <a:lnTo>
+                  <a:pt x="9743832" y="0"/>
+                </a:lnTo>
+                <a:lnTo>
+                  <a:pt x="9743832" y="10202965"/>
+                </a:lnTo>
+                <a:lnTo>
+                  <a:pt x="0" y="10202965"/>
+                </a:lnTo>
+                <a:lnTo>
+                  <a:pt x="0" y="0"/>
+                </a:lnTo>
+                <a:close/>
+              </a:path>
+            </a:pathLst>
+          </a:custGeom>
+          <a:blipFill>
+            <a:blip r:embed="rId2">
+              <a:extLst>
+                <a:ext uri="{96DAC541-7B7A-43D3-8B79-37D633B846F1}">
+                  <asvg:svgBlip xmlns:asvg="http://schemas.microsoft.com/office/drawing/2016/SVG/main" r:embed="rId3"/>
+                </a:ext>
+              </a:extLst>
+            </a:blip>
+            <a:stretch>
+              <a:fillRect/>
+            </a:stretch>
+          </a:blipFill>
+        </p:spPr>
+      </p:sp>
+      <p:sp>
+        <p:nvSpPr>
+          <p:cNvPr id="3" name="Freeform 3"/>
+          <p:cNvSpPr/>
+          <p:nvPr/>
+        </p:nvSpPr>
+        <p:spPr>
+          <a:xfrm rot="2472354" flipH="1">
+            <a:off x="-1655856" y="-720788"/>
+            <a:ext cx="9743832" cy="10202966"/>
+          </a:xfrm>
+          <a:custGeom>
+            <a:avLst/>
+            <a:gdLst/>
+            <a:ahLst/>
+            <a:cxnLst/>
+            <a:rect l="l" t="t" r="r" b="b"/>
+            <a:pathLst>
+              <a:path w="9743832" h="10202966">
+                <a:moveTo>
+                  <a:pt x="9743833" y="0"/>
+                </a:moveTo>
+                <a:lnTo>
+                  <a:pt x="0" y="0"/>
+                </a:lnTo>
+                <a:lnTo>
+                  <a:pt x="0" y="10202965"/>
+                </a:lnTo>
+                <a:lnTo>
+                  <a:pt x="9743833" y="10202965"/>
+                </a:lnTo>
+                <a:lnTo>
+                  <a:pt x="9743833" y="0"/>
+                </a:lnTo>
+                <a:close/>
+              </a:path>
+            </a:pathLst>
+          </a:custGeom>
+          <a:blipFill>
+            <a:blip r:embed="rId2">
+              <a:extLst>
+                <a:ext uri="{96DAC541-7B7A-43D3-8B79-37D633B846F1}">
+                  <asvg:svgBlip xmlns:asvg="http://schemas.microsoft.com/office/drawing/2016/SVG/main" r:embed="rId3"/>
+                </a:ext>
+              </a:extLst>
+            </a:blip>
+            <a:stretch>
+              <a:fillRect/>
+            </a:stretch>
+          </a:blipFill>
+        </p:spPr>
+      </p:sp>
+      <p:sp>
+        <p:nvSpPr>
+          <p:cNvPr id="4" name="Freeform 4"/>
+          <p:cNvSpPr/>
+          <p:nvPr/>
+        </p:nvSpPr>
+        <p:spPr>
+          <a:xfrm rot="-441338" flipH="1">
+            <a:off x="2946394" y="1597514"/>
+            <a:ext cx="12395216" cy="7780208"/>
+          </a:xfrm>
+          <a:custGeom>
+            <a:avLst/>
+            <a:gdLst/>
+            <a:ahLst/>
+            <a:cxnLst/>
+            <a:rect l="l" t="t" r="r" b="b"/>
+            <a:pathLst>
+              <a:path w="12395216" h="7780208">
+                <a:moveTo>
+                  <a:pt x="12395216" y="0"/>
+                </a:moveTo>
+                <a:lnTo>
+                  <a:pt x="0" y="0"/>
+                </a:lnTo>
+                <a:lnTo>
+                  <a:pt x="0" y="7780208"/>
+                </a:lnTo>
+                <a:lnTo>
+                  <a:pt x="12395216" y="7780208"/>
+                </a:lnTo>
+                <a:lnTo>
+                  <a:pt x="12395216" y="0"/>
+                </a:lnTo>
+                <a:close/>
+              </a:path>
+            </a:pathLst>
+          </a:custGeom>
+          <a:blipFill>
+            <a:blip r:embed="rId4">
+              <a:extLst>
+                <a:ext uri="{96DAC541-7B7A-43D3-8B79-37D633B846F1}">
+                  <asvg:svgBlip xmlns:asvg="http://schemas.microsoft.com/office/drawing/2016/SVG/main" r:embed="rId5"/>
+                </a:ext>
+              </a:extLst>
+            </a:blip>
+            <a:stretch>
+              <a:fillRect/>
+            </a:stretch>
+          </a:blipFill>
+        </p:spPr>
+      </p:sp>
+      <p:sp>
+        <p:nvSpPr>
+          <p:cNvPr id="5" name="Freeform 5"/>
+          <p:cNvSpPr/>
+          <p:nvPr/>
+        </p:nvSpPr>
+        <p:spPr>
+          <a:xfrm flipH="1">
+            <a:off x="13732019" y="4207014"/>
+            <a:ext cx="4113256" cy="6538413"/>
+          </a:xfrm>
+          <a:custGeom>
+            <a:avLst/>
+            <a:gdLst/>
+            <a:ahLst/>
+            <a:cxnLst/>
+            <a:rect l="l" t="t" r="r" b="b"/>
+            <a:pathLst>
+              <a:path w="4113256" h="6538413">
+                <a:moveTo>
+                  <a:pt x="4113256" y="0"/>
+                </a:moveTo>
+                <a:lnTo>
+                  <a:pt x="0" y="0"/>
+                </a:lnTo>
+                <a:lnTo>
+                  <a:pt x="0" y="6538413"/>
+                </a:lnTo>
+                <a:lnTo>
+                  <a:pt x="4113256" y="6538413"/>
+                </a:lnTo>
+                <a:lnTo>
+                  <a:pt x="4113256" y="0"/>
+                </a:lnTo>
+                <a:close/>
+              </a:path>
+            </a:pathLst>
+          </a:custGeom>
+          <a:blipFill>
+            <a:blip r:embed="rId6">
+              <a:extLst>
+                <a:ext uri="{96DAC541-7B7A-43D3-8B79-37D633B846F1}">
+                  <asvg:svgBlip xmlns:asvg="http://schemas.microsoft.com/office/drawing/2016/SVG/main" r:embed="rId7"/>
+                </a:ext>
+              </a:extLst>
+            </a:blip>
+            <a:stretch>
+              <a:fillRect/>
+            </a:stretch>
+          </a:blipFill>
+        </p:spPr>
+      </p:sp>
+      <p:sp>
+        <p:nvSpPr>
+          <p:cNvPr id="6" name="Freeform 6"/>
+          <p:cNvSpPr/>
+          <p:nvPr/>
+        </p:nvSpPr>
+        <p:spPr>
+          <a:xfrm>
+            <a:off x="820399" y="2005164"/>
+            <a:ext cx="3357908" cy="8281836"/>
+          </a:xfrm>
+          <a:custGeom>
+            <a:avLst/>
+            <a:gdLst/>
+            <a:ahLst/>
+            <a:cxnLst/>
+            <a:rect l="l" t="t" r="r" b="b"/>
+            <a:pathLst>
+              <a:path w="3357908" h="8281836">
+                <a:moveTo>
+                  <a:pt x="0" y="0"/>
+                </a:moveTo>
+                <a:lnTo>
+                  <a:pt x="3357908" y="0"/>
+                </a:lnTo>
+                <a:lnTo>
+                  <a:pt x="3357908" y="8281836"/>
+                </a:lnTo>
+                <a:lnTo>
+                  <a:pt x="0" y="8281836"/>
+                </a:lnTo>
+                <a:lnTo>
+                  <a:pt x="0" y="0"/>
+                </a:lnTo>
+                <a:close/>
+              </a:path>
+            </a:pathLst>
+          </a:custGeom>
+          <a:blipFill>
+            <a:blip r:embed="rId8">
+              <a:extLst>
+                <a:ext uri="{96DAC541-7B7A-43D3-8B79-37D633B846F1}">
+                  <asvg:svgBlip xmlns:asvg="http://schemas.microsoft.com/office/drawing/2016/SVG/main" r:embed="rId9"/>
+                </a:ext>
+              </a:extLst>
+            </a:blip>
+            <a:stretch>
+              <a:fillRect/>
+            </a:stretch>
+          </a:blipFill>
+        </p:spPr>
+      </p:sp>
+      <p:sp>
+        <p:nvSpPr>
+          <p:cNvPr id="7" name="Freeform 7"/>
+          <p:cNvSpPr/>
+          <p:nvPr/>
+        </p:nvSpPr>
+        <p:spPr>
+          <a:xfrm flipH="1">
+            <a:off x="14908788" y="2448585"/>
+            <a:ext cx="2936487" cy="1841978"/>
+          </a:xfrm>
+          <a:custGeom>
+            <a:avLst/>
+            <a:gdLst/>
+            <a:ahLst/>
+            <a:cxnLst/>
+            <a:rect l="l" t="t" r="r" b="b"/>
+            <a:pathLst>
+              <a:path w="2936487" h="1841978">
+                <a:moveTo>
+                  <a:pt x="2936487" y="0"/>
+                </a:moveTo>
+                <a:lnTo>
+                  <a:pt x="0" y="0"/>
+                </a:lnTo>
+                <a:lnTo>
+                  <a:pt x="0" y="1841979"/>
+                </a:lnTo>
+                <a:lnTo>
+                  <a:pt x="2936487" y="1841979"/>
+                </a:lnTo>
+                <a:lnTo>
+                  <a:pt x="2936487" y="0"/>
+                </a:lnTo>
+                <a:close/>
+              </a:path>
+            </a:pathLst>
+          </a:custGeom>
+          <a:blipFill>
+            <a:blip r:embed="rId10">
+              <a:extLst>
+                <a:ext uri="{96DAC541-7B7A-43D3-8B79-37D633B846F1}">
+                  <asvg:svgBlip xmlns:asvg="http://schemas.microsoft.com/office/drawing/2016/SVG/main" r:embed="rId11"/>
+                </a:ext>
+              </a:extLst>
+            </a:blip>
+            <a:stretch>
+              <a:fillRect/>
+            </a:stretch>
+          </a:blipFill>
+        </p:spPr>
+      </p:sp>
+      <p:sp>
+        <p:nvSpPr>
+          <p:cNvPr id="8" name="TextBox 8"/>
+          <p:cNvSpPr txBox="1"/>
+          <p:nvPr/>
+        </p:nvSpPr>
+        <p:spPr>
+          <a:xfrm>
+            <a:off x="4033464" y="4207014"/>
+            <a:ext cx="10221072" cy="3119315"/>
+          </a:xfrm>
+          <a:prstGeom prst="rect">
+            <a:avLst/>
+          </a:prstGeom>
+        </p:spPr>
+        <p:txBody>
+          <a:bodyPr wrap="square" lIns="0" tIns="0" rIns="0" bIns="0" rtlCol="0" anchor="t">
+            <a:spAutoFit/>
+          </a:bodyPr>
+          <a:lstStyle/>
+          <a:p>
+            <a:pPr marL="342900" indent="-342900">
+              <a:lnSpc>
+                <a:spcPts val="3499"/>
+              </a:lnSpc>
+              <a:buFont typeface="Arial" panose="020B0604020202020204" pitchFamily="34" charset="0"/>
+              <a:buChar char="•"/>
+            </a:pPr>
+            <a:r>
+              <a:rPr lang="ka-GE" sz="2499" dirty="0">
+                <a:solidFill>
+                  <a:srgbClr val="3B365F"/>
+                </a:solidFill>
+                <a:latin typeface="Coco Gothic"/>
+                <a:ea typeface="Coco Gothic"/>
+                <a:cs typeface="Coco Gothic"/>
+                <a:sym typeface="Coco Gothic"/>
+              </a:rPr>
+              <a:t>კარგი მოვლის საფუძველი – პაციენტის უსაფრთხოება არის ხარისხიანი მკურნალობის მთავარი ნაწილი. </a:t>
+            </a:r>
+          </a:p>
+          <a:p>
+            <a:pPr marL="342900" indent="-342900">
+              <a:lnSpc>
+                <a:spcPts val="3499"/>
+              </a:lnSpc>
+              <a:buFont typeface="Arial" panose="020B0604020202020204" pitchFamily="34" charset="0"/>
+              <a:buChar char="•"/>
+            </a:pPr>
+            <a:r>
+              <a:rPr lang="ka-GE" sz="2499" dirty="0">
+                <a:solidFill>
+                  <a:srgbClr val="3B365F"/>
+                </a:solidFill>
+                <a:latin typeface="Coco Gothic"/>
+                <a:ea typeface="Coco Gothic"/>
+                <a:cs typeface="Coco Gothic"/>
+                <a:sym typeface="Coco Gothic"/>
+              </a:rPr>
+              <a:t>შეცდომების შემცირება მთავარი მიზანი – მთავარი არა შეცდომის მოძებნა, არამედ მათი თავიდან აცილებაა.</a:t>
+            </a:r>
+          </a:p>
+          <a:p>
+            <a:pPr marL="342900" indent="-342900">
+              <a:lnSpc>
+                <a:spcPts val="3499"/>
+              </a:lnSpc>
+              <a:buFont typeface="Arial" panose="020B0604020202020204" pitchFamily="34" charset="0"/>
+              <a:buChar char="•"/>
+            </a:pPr>
+            <a:r>
+              <a:rPr lang="ka-GE" sz="2499" dirty="0">
+                <a:solidFill>
+                  <a:srgbClr val="3B365F"/>
+                </a:solidFill>
+                <a:latin typeface="Coco Gothic"/>
+                <a:ea typeface="Coco Gothic"/>
+                <a:cs typeface="Coco Gothic"/>
+                <a:sym typeface="Coco Gothic"/>
+              </a:rPr>
+              <a:t>უსაფრთხო გარემო – საავადმყოფოში ან კლინიკაში შექმნილი გარემო უნდა იყოს ისე, რომ შეცდომა თითქმის შეუძლებელი იყოს.</a:t>
+            </a:r>
+            <a:endParaRPr lang="en-US" sz="2499" dirty="0">
+              <a:solidFill>
+                <a:srgbClr val="3B365F"/>
+              </a:solidFill>
+              <a:latin typeface="Coco Gothic"/>
+              <a:ea typeface="Coco Gothic"/>
+              <a:cs typeface="Coco Gothic"/>
+              <a:sym typeface="Coco Gothic"/>
+            </a:endParaRPr>
+          </a:p>
+        </p:txBody>
+      </p:sp>
+      <p:sp>
+        <p:nvSpPr>
+          <p:cNvPr id="9" name="TextBox 9"/>
+          <p:cNvSpPr txBox="1"/>
+          <p:nvPr/>
+        </p:nvSpPr>
+        <p:spPr>
+          <a:xfrm>
+            <a:off x="3216060" y="795606"/>
+            <a:ext cx="11345623" cy="598562"/>
+          </a:xfrm>
+          <a:prstGeom prst="rect">
+            <a:avLst/>
+          </a:prstGeom>
+        </p:spPr>
+        <p:txBody>
+          <a:bodyPr wrap="square" lIns="0" tIns="0" rIns="0" bIns="0" rtlCol="0" anchor="t">
+            <a:spAutoFit/>
+          </a:bodyPr>
+          <a:lstStyle/>
+          <a:p>
+            <a:pPr algn="ctr">
+              <a:lnSpc>
+                <a:spcPts val="3919"/>
+              </a:lnSpc>
+            </a:pPr>
+            <a:r>
+              <a:rPr lang="ka-GE" sz="6600" dirty="0"/>
+              <a:t>პაციენტის უსაფრთხოება</a:t>
+            </a:r>
+            <a:endParaRPr lang="en-US" sz="6600" dirty="0">
+              <a:sym typeface="TAN Headline"/>
+            </a:endParaRPr>
           </a:p>
         </p:txBody>
       </p:sp>
